--- a/LDA_超导量子计算芯片介绍_路演/LDA_超导量子计算芯片介绍_路演.pptx
+++ b/LDA_超导量子计算芯片介绍_路演/LDA_超导量子计算芯片介绍_路演.pptx
@@ -556,7 +556,7 @@
   <p:cSld>
     <p:spTree>
       <p:nvGrpSpPr>
-        <p:cNvPr id="1" name="" descr="&lt;Slide style={{ width: 1280, height: 720, padding: '72px 72px 56px 72px', background: '#061F32', fontFamily: 'Arial, &quot;PingFang SC&quot;, &quot;Microsoft YaHei&quot;, &quot;Noto Sans SC&quot;, sans-serif', flexDirection: 'column', justifyContent: 'space-between' }}&gt;&#10;  &lt;Box style={{ flexDirection: 'row', alignItems: 'center', gap: 14 }}&gt;&#10;    &lt;svg width={30} height={30} viewBox='0 0 28 28'&gt;&#10;      &lt;rect x='0' y='0' width='12' height='12' fill='#08A6F6' /&gt;&#10;      &lt;rect x='16' y='0' width='12' height='12' fill='#99BDED' /&gt;&#10;      &lt;rect x='0' y='16' width='12' height='12' fill='#99BDED' /&gt;&#10;      &lt;rect x='16' y='16' width='12' height='12' fill='#08A6F6' /&gt;&#10;    &lt;/svg&gt;&#10;    &lt;Text style={{ fontSize: 18, color: '#99BDED', letterSpacing: 2, fontWeight: 'bold' }}&gt;LDA · 开源 Agent-native EDA（MIT）· 量子芯片征程&lt;/Text&gt;&#10;  &lt;/Box&gt;&#10;&#10;  &lt;Box style={{ flexDirection: 'column', gap: 24 }}&gt;&#10;    &lt;Text style={{ fontSize: 78, fontWeight: 'bold', color: '#FFFFFF', lineHeight: 1.12 }}&gt;超导量子计算芯片&lt;br /&gt;LDA-S&lt;/Text&gt;&#10;    &lt;Box style={{ width: 132, height: 5, background: '#08A6F6' }} /&gt;&#10;    &lt;Text style={{ fontSize: 26, color: '#E7E6E6', lineHeight: 1.5 }}&gt;transmon 微波 QEDA · 从单比特单元到 1024 比特阵列版图（32×32）&lt;br /&gt;P&amp;amp;R 与全链路签核闭环 · 平台自写 GDSII 编码器直出&lt;/Text&gt;&#10;  &lt;/Box&gt;&#10;&#10;  &lt;Box style={{ flexDirection: 'column', gap: 14 }}&gt;&#10;    &lt;Text style={{ fontSize: 21, color: '#99BDED', lineHeight: 1.5 }}&gt;这不是一次器件仿真，而是一次「平台能不能真的画出一颗芯片」的体检——用 LDA 亲手设计，吃自己的狗粮。&lt;/Text&gt;&#10;    &lt;Box style={{ height: 1, background: '#44546A' }} /&gt;&#10;    &lt;Box style={{ flexDirection: 'row', justifyContent: 'space-between', alignItems: 'center' }}&gt;&#10;      &lt;Text style={{ fontSize: 17, color: '#808080' }}&gt;LDA 工程团队 · 2026-09-30 · 平台版本 0.9.144&lt;/Text&gt;&#10;      &lt;Text style={{ fontSize: 17, color: '#808080' }}&gt;口径：设计期签核 · 非流片后实测&lt;/Text&gt;&#10;    &lt;/Box&gt;&#10;  &lt;/Box&gt;&#10;&lt;/Slide&gt;&#10;"/>
+        <p:cNvPr id="1" name="" descr="&lt;Slide style={{ width: 1280, height: 720, padding: '72px 72px 56px 72px', background: '#061F32', fontFamily: 'Arial, &quot;PingFang SC&quot;, &quot;Microsoft YaHei&quot;, &quot;Noto Sans SC&quot;, sans-serif', flexDirection: 'column', justifyContent: 'space-between' }}&gt;&#10;  &lt;Box style={{ flexDirection: 'row', alignItems: 'center', gap: 14 }}&gt;&#10;    &lt;svg width={30} height={30} viewBox='0 0 28 28'&gt;&#10;      &lt;rect x='0' y='0' width='12' height='12' fill='#08A6F6' /&gt;&#10;      &lt;rect x='16' y='0' width='12' height='12' fill='#99BDED' /&gt;&#10;      &lt;rect x='0' y='16' width='12' height='12' fill='#99BDED' /&gt;&#10;      &lt;rect x='16' y='16' width='12' height='12' fill='#08A6F6' /&gt;&#10;    &lt;/svg&gt;&#10;    &lt;Text style={{ fontSize: 18, color: '#99BDED', letterSpacing: 2, fontWeight: 'bold' }}&gt;LDA · 开源 Agent-native EDA（MIT）· 量子芯片征程&lt;/Text&gt;&#10;  &lt;/Box&gt;&#10;&#10;  &lt;Box style={{ flexDirection: 'column', gap: 24 }}&gt;&#10;    &lt;Text style={{ fontSize: 78, fontWeight: 'bold', color: '#FFFFFF', lineHeight: 1.12 }}&gt;超导量子计算芯片&lt;br /&gt;LDA-S&lt;/Text&gt;&#10;    &lt;Box style={{ width: 132, height: 5, background: '#08A6F6' }} /&gt;&#10;    &lt;Text style={{ fontSize: 26, color: '#E7E6E6', lineHeight: 1.5 }}&gt;transmon 微波 QEDA · 从单比特单元到 1024 比特阵列版图（32×32）&lt;br /&gt;P&amp;amp;R 与全链路签核闭环 · 平台自写 GDSII 编码器直出&lt;/Text&gt;&#10;  &lt;/Box&gt;&#10;&#10;  &lt;Box style={{ flexDirection: 'column', gap: 14 }}&gt;&#10;    &lt;Text style={{ fontSize: 21, color: '#99BDED', lineHeight: 1.5 }}&gt;这不是一次器件仿真，而是一次「平台能不能真的画出一颗芯片」的体检——用 LDA 亲手设计，吃自己的狗粮。&lt;/Text&gt;&#10;    &lt;Box style={{ height: 1, background: '#44546A' }} /&gt;&#10;    &lt;Box style={{ flexDirection: 'row', justifyContent: 'space-between', alignItems: 'center' }}&gt;&#10;      &lt;Text style={{ fontSize: 17, color: '#808080' }}&gt;LDA 工程团队 · 2026-09-30 · 平台版本 0.9.145&lt;/Text&gt;&#10;      &lt;Text style={{ fontSize: 17, color: '#808080' }}&gt;口径：设计期签核 · 非流片后实测&lt;/Text&gt;&#10;    &lt;/Box&gt;&#10;  &lt;/Box&gt;&#10;&lt;/Slide&gt;&#10;"/>
         <p:cNvGrpSpPr/>
         <p:nvPr/>
       </p:nvGrpSpPr>
@@ -1126,7 +1126,7 @@
                 <a:latin typeface="Arial"/>
                 <a:ea typeface="Arial"/>
               </a:rPr>
-              <a:t xml:space="preserve"> 0.9.144</a:t>
+              <a:t xml:space="preserve"> 0.9.145</a:t>
             </a:r>
             <a:endParaRPr/>
           </a:p>
